--- a/Documentations/Sanity pack set up AutomationFramework.pptx
+++ b/Documentations/Sanity pack set up AutomationFramework.pptx
@@ -14820,8 +14820,8 @@
         </p:nvSpPr>
         <p:spPr>
           <a:xfrm>
-            <a:off x="914400" y="1353312"/>
-            <a:ext cx="3200400" cy="228600"/>
+            <a:off x="914400" y="1498239"/>
+            <a:ext cx="3749040" cy="228600"/>
           </a:xfrm>
           <a:prstGeom prst="rect">
             <a:avLst/>
@@ -14833,9 +14833,6 @@
           <a:bodyPr wrap="square" lIns="0" tIns="0" rIns="0" bIns="0" rtlCol="0" anchor="ctr"/>
           <a:lstStyle/>
           <a:p>
-            <a:pPr marL="0" indent="0">
-              <a:buNone/>
-            </a:pPr>
             <a:r>
               <a:rPr lang="en-US" sz="1000" dirty="0">
                 <a:solidFill>
@@ -14845,7 +14842,18 @@
                 <a:ea typeface="Consolas" pitchFamily="34" charset="-122"/>
                 <a:cs typeface="Consolas" pitchFamily="34" charset="-120"/>
               </a:rPr>
-              <a:t>git clone &lt;repo-url&gt;</a:t>
+              <a:t>git clone </a:t>
+            </a:r>
+            <a:r>
+              <a:rPr lang="en-US" sz="1000" dirty="0">
+                <a:solidFill>
+                  <a:srgbClr val="00C2FF"/>
+                </a:solidFill>
+                <a:latin typeface="Consolas" pitchFamily="34" charset="0"/>
+                <a:ea typeface="Consolas" pitchFamily="34" charset="-122"/>
+                <a:cs typeface="Consolas" pitchFamily="34" charset="-120"/>
+              </a:rPr>
+              <a:t>https://github.com/pradeepkumarqwert/DF_Automation_Testing_Sanity.git</a:t>
             </a:r>
             <a:endParaRPr lang="en-US" sz="1000" dirty="0"/>
           </a:p>
